--- a/pptx/orta3.pptx
+++ b/pptx/orta3.pptx
@@ -3713,8 +3713,49 @@
                 <a:ea typeface="Calibri" pitchFamily="34" charset="-122"/>
                 <a:cs typeface="Calibri" pitchFamily="34" charset="-120"/>
               </a:rPr>
-              <a:t>2026 TTKD Öğretim Programı — 2. Seviye: 4A2; 3. Seviye: 1B3, 3A5; 4. Seviye: 2B1, 4C1</a:t>
-            </a:r>
+              <a:t>2026 TTKD Öğretim Programı </a:t>
+            </a:r>
+            <a:r>
+              <a:rPr lang="tr-TR" sz="1000" dirty="0" smtClean="0">
+                <a:solidFill>
+                  <a:srgbClr val="94A3B8"/>
+                </a:solidFill>
+                <a:latin typeface="Calibri" pitchFamily="34" charset="0"/>
+                <a:ea typeface="Calibri" pitchFamily="34" charset="-122"/>
+                <a:cs typeface="Calibri" pitchFamily="34" charset="-120"/>
+              </a:rPr>
+              <a:t>—3</a:t>
+            </a:r>
+            <a:r>
+              <a:rPr lang="tr-TR" sz="1000" dirty="0">
+                <a:solidFill>
+                  <a:srgbClr val="94A3B8"/>
+                </a:solidFill>
+                <a:latin typeface="Calibri" pitchFamily="34" charset="0"/>
+                <a:ea typeface="Calibri" pitchFamily="34" charset="-122"/>
+                <a:cs typeface="Calibri" pitchFamily="34" charset="-120"/>
+              </a:rPr>
+              <a:t>. Seviye: 1B3, </a:t>
+            </a:r>
+            <a:r>
+              <a:rPr lang="tr-TR" sz="1000" dirty="0" smtClean="0">
+                <a:solidFill>
+                  <a:srgbClr val="94A3B8"/>
+                </a:solidFill>
+                <a:latin typeface="Calibri" pitchFamily="34" charset="0"/>
+                <a:ea typeface="Calibri" pitchFamily="34" charset="-122"/>
+                <a:cs typeface="Calibri" pitchFamily="34" charset="-120"/>
+              </a:rPr>
+              <a:t>3A5</a:t>
+            </a:r>
+            <a:endParaRPr lang="tr-TR" sz="1000" dirty="0">
+              <a:solidFill>
+                <a:srgbClr val="94A3B8"/>
+              </a:solidFill>
+              <a:latin typeface="Calibri" pitchFamily="34" charset="0"/>
+              <a:ea typeface="Calibri" pitchFamily="34" charset="-122"/>
+              <a:cs typeface="Calibri" pitchFamily="34" charset="-120"/>
+            </a:endParaRPr>
           </a:p>
         </p:txBody>
       </p:sp>
